--- a/docs/presentations/ai-assisted-development-story.pptx
+++ b/docs/presentations/ai-assisted-development-story.pptx
@@ -156,6 +156,14 @@
 </p:presentation>
 </file>
 
+<file path=ppt/revisionInfo.xml><?xml version="1.0" encoding="utf-8"?>
+<p1510:revInfo xmlns:a="http://schemas.openxmlformats.org/drawingml/2006/main" xmlns:r="http://schemas.openxmlformats.org/officeDocument/2006/relationships" xmlns:p1510="http://schemas.microsoft.com/office/powerpoint/2015/10/main">
+  <p1510:revLst>
+    <p1510:client id="{3C73BF7C-5CFF-47DF-BA55-A3DD79C44D2D}" v="13" dt="2026-07-17T19:07:53.175"/>
+  </p1510:revLst>
+</p1510:revInfo>
+</file>
+
 <file path=ppt/notesMasters/notesMaster1.xml><?xml version="1.0" encoding="utf-8"?>
 <p:notesMaster xmlns:a="http://schemas.openxmlformats.org/drawingml/2006/main" xmlns:r="http://schemas.openxmlformats.org/officeDocument/2006/relationships" xmlns:p="http://schemas.openxmlformats.org/presentationml/2006/main">
   <p:cSld>
@@ -326,16 +334,36 @@
           <a:lstStyle/>
           <a:p>
             <a:r>
+              <a:rPr lang="en-US" sz="1400" b="0" dirty="0"/>
+              <a:t>I am Vivek Rawat and I am working with Kirkland as Solution architect.</a:t>
+            </a:r>
+          </a:p>
+          <a:p>
+            <a:endParaRPr lang="en-US" sz="1400" b="0" dirty="0"/>
+          </a:p>
+          <a:p>
+            <a:r>
+              <a:rPr lang="en-US" sz="1400" b="0" dirty="0"/>
+              <a:t>I love stories, specially Science fiction, Unfortunately, the story that we will go though today is not fiction, its the hard reality that we are working in.</a:t>
+            </a:r>
+          </a:p>
+          <a:p>
+            <a:endParaRPr lang="en-US" sz="1400" b="0" dirty="0"/>
+          </a:p>
+          <a:p>
+            <a:r>
+              <a:rPr lang="en-US" sz="1400" b="0" dirty="0"/>
+              <a:t>And the story is</a:t>
+            </a:r>
+            <a:r>
               <a:rPr lang="en-US" dirty="0"/>
-              <a:t>Let me start with a question. Who here is still writing code? Like, actually writing it yourself?
-…Anyone?
-Yeah. That's kind of the point.
-The AI writes the code now. And honestly — the interesting question was never whether it replaces us. It's what's left.
-I keep coming back to four things it can't take.
+              <a:t>
+AI writes the code now. And honestly — the interesting question was never whether it replaces us. It is what's left for us.
+While thinking a lot, I keep coming back to four questions:
 Craft — if I'm not writing the code, what is my craft now? What do I bring?
 Responsibility — when it gets it wrong, who actually understands what went wrong? And who answers for it?
 Team — there's a new member on every team now. Never sleeps, never complains, and sometimes confidently ships something completely broken. Do we work with it… or manage it?
-And a fourth one that keeps me up at night — judgment. AI can generate code but it can't decide if something should be built. That's still a human call. And in a world where it's this easy to ship things fast… that call matters more than ever.
+And a fourth, judgment. AI can generate code but it can't decide if something should be built. That's still a human call. And in a world where it's this easy to ship things fast… that call matters more than ever.
 Everything ahead is built around those four.</a:t>
             </a:r>
           </a:p>
@@ -424,8 +452,22 @@
             <a:r>
               <a:rPr lang="en-US" dirty="0"/>
               <a:t>So what is the spec? We call it ICEA — four questions that together give the AI everything it needs to build the right thing.
-The first is Intent — what are we actually building and why, not the ticket title but the real business goal behind the ask. The second is Context — this is where you describe where the feature lives, what the stack looks like, what the auth model is, and what the edge cases are. The third is Examples — this is where you show instead of tell, using real scenarios, given this situation, when this happens, then this is the expected result. And the fourth is Acceptance — a definition of done that is specific enough that you could test it and get a clear pass or fail, with no room for argument.
-It is not a form. It is the thinking that used to just not happen — and each part feeds directly into what comes next, whether that is the design, the tests, or closing the ticket.</a:t>
+The first is Intent — what are we actually building and why, not the ticket title but the real business goal behind the ask. </a:t>
+            </a:r>
+            <a:br>
+              <a:rPr lang="en-US" dirty="0"/>
+            </a:br>
+            <a:r>
+              <a:rPr lang="en-US" dirty="0"/>
+              <a:t>The second is Context — this is where you describe where the feature lives, what the stack looks like, what the auth model is, and what the edge cases are. </a:t>
+            </a:r>
+            <a:br>
+              <a:rPr lang="en-US" dirty="0"/>
+            </a:br>
+            <a:r>
+              <a:rPr lang="en-US" dirty="0"/>
+              <a:t>The third is Examples — this is where you show instead of tell, using real scenarios, given this situation, when this happens, then this is the expected result. And the fourth is Acceptance — a definition of done that is specific enough that you could test it and get a clear pass or fail, with no room for argument.
+In nutshell, It is not a form. It is the thinking that used to just not happen — and each part feeds directly into what comes next, whether that is the design, the tests, or closing the ticket.</a:t>
             </a:r>
           </a:p>
         </p:txBody>
@@ -693,7 +735,14 @@
               <a:t>Mechanically, act one is really just a relationship. You write the contract — Intent, Context, Examples, Acceptance. The AI builds against it. You type APPROVE, and that's your signature. Nothing gets built without it. And before a single file lands on disk, you see the diff and you sign again.
 Under the hood there's a ladder — the model proposes, hooks intercept, Git and CI hold the floor — but I don't really care about the plumbing here. What matters is that at every step, there's a named person who owns a decision.
 That's the exact thing that disappeared when the AI became the peer. This is where we put it back.
-And it creates a new problem almost immediately.</a:t>
+And then it creates a new problem almost immediately.</a:t>
+            </a:r>
+            <a:br>
+              <a:rPr lang="en-US" dirty="0"/>
+            </a:br>
+            <a:r>
+              <a:rPr lang="en-US" dirty="0"/>
+              <a:t>So, let’s look into that problem now.</a:t>
             </a:r>
           </a:p>
         </p:txBody>
@@ -1323,7 +1372,7 @@
               <a:rPr lang="en-US" dirty="0"/>
               <a:t>Look at this. Understand the change. Make it. Push it. Ask someone to review it.
 Honestly — how many of us still run this exact process today?
-I bet… most of us. Because it works. And it did — for a long time. So what quietly changed?</a:t>
+I bet… most of us. Because it works. And it did — for a long time. So, what quietly changed?</a:t>
             </a:r>
           </a:p>
         </p:txBody>
@@ -2296,11 +2345,25 @@
             <a:r>
               <a:rPr lang="en-US" dirty="0"/>
               <a:t>So let's look into what changed.
-That one person in this process — the one who'd ask "are you sure about this?" — is quietly being replaced by an AI.
-And one more question worth asking. Even when we have a human reviewer… how many are actually reviewing it themselves? Or are they just delegating to AI?
-So now we've got AI writing and reviewing the code. Two AIs agreeing and nobody in that loop is asking "are you sure?"
-This process looks the same. But that one person who used to keep it honest — gone from both ends.
-Everything I built next was one long attempt to put that missing check back.</a:t>
+This is the loop that we just talk about. Make it, Push it, Ask someone to review and ship it. the look is still the same, but that 1 person who was keep this loop honest by asking "Are you sure?", "will it do what it is supposed to?" has either completely gone or is asking AI to review.</a:t>
+            </a:r>
+          </a:p>
+          <a:p>
+            <a:br>
+              <a:rPr lang="en-US" dirty="0"/>
+            </a:br>
+            <a:r>
+              <a:rPr lang="en-US" dirty="0"/>
+              <a:t>So, its kind of.. AI is asking AI about the code written by AI to be reviewed by AI and AI says "All is well".</a:t>
+            </a:r>
+          </a:p>
+          <a:p>
+            <a:br>
+              <a:rPr lang="en-US" dirty="0"/>
+            </a:br>
+            <a:r>
+              <a:rPr lang="en-US" dirty="0"/>
+              <a:t>Everything I built next was a one long attempt to put that missing check back.</a:t>
             </a:r>
           </a:p>
         </p:txBody>
@@ -3275,10 +3338,70 @@
           <a:p>
             <a:r>
               <a:rPr lang="en-US" dirty="0"/>
-              <a:t>So when coding gets cheaper, thinking gets more valuable — and thinking, that's the job now.
-Five things shifted. You're the one who turns a one-line ask into an actual requirement. You need to understand the whole system, not just the file you happen to be in. You have to look at the AI's plan and be able to say what's out of scope and why. You can't just look at the impacted lines anymore. And most importantly, you're now the person managing an agent to a result — not writing it yourself.
-It's less like coding and more like conducting. And honestly, it's a harder job.
-So let's look at each of these five.</a:t>
+              <a:t>finally to this important slide, which again asks,  what is your role now?</a:t>
+            </a:r>
+          </a:p>
+          <a:p>
+            <a:br>
+              <a:rPr lang="en-US" dirty="0"/>
+            </a:br>
+            <a:r>
+              <a:rPr lang="en-US" dirty="0"/>
+              <a:t>Believe me, this is not a simple question and I am trying my best mentoring my team to fit in this new role. </a:t>
+            </a:r>
+          </a:p>
+          <a:p>
+            <a:r>
+              <a:rPr lang="en-US" dirty="0"/>
+              <a:t>Its hard, because it requires a mind shift.</a:t>
+            </a:r>
+          </a:p>
+          <a:p>
+            <a:br>
+              <a:rPr lang="en-US" dirty="0"/>
+            </a:br>
+            <a:r>
+              <a:rPr lang="en-US" dirty="0"/>
+              <a:t>Your new role needs you to wear all these 5 hats (irrespective of junior or senior title).</a:t>
+            </a:r>
+          </a:p>
+          <a:p>
+            <a:r>
+              <a:rPr lang="en-US" dirty="0"/>
+              <a:t>So, first is responsibility: BA, You can no longer understand just the story, you need to look at big picture where this story fits. </a:t>
+            </a:r>
+          </a:p>
+          <a:p>
+            <a:r>
+              <a:rPr lang="en-US" dirty="0"/>
+              <a:t>Second: You can no longer look at a file, do a patch work and say I did it. you need to start thinking like a lead and have understanding of the whole system.</a:t>
+            </a:r>
+          </a:p>
+          <a:p>
+            <a:r>
+              <a:rPr lang="en-US" dirty="0"/>
+              <a:t>Third: AI generates a plan before it does anything, so you should be able to review the plan and like a detective identify what's out of scope.</a:t>
+            </a:r>
+          </a:p>
+          <a:p>
+            <a:r>
+              <a:rPr lang="en-US" dirty="0"/>
+              <a:t>and finally: AI has joined as a new team member. You are not supposed to work with it, your role is to manage it.</a:t>
+            </a:r>
+          </a:p>
+          <a:p>
+            <a:endParaRPr lang="en-US" dirty="0"/>
+          </a:p>
+          <a:p>
+            <a:r>
+              <a:rPr lang="en-US" dirty="0"/>
+              <a:t>As you can see, its hard and this line at the bottom, coder -&gt; conductor is how your job is shifting. </a:t>
+            </a:r>
+          </a:p>
+          <a:p>
+            <a:r>
+              <a:rPr lang="en-US" dirty="0"/>
+              <a:t>Lets look into each one of these.</a:t>
             </a:r>
           </a:p>
         </p:txBody>
@@ -4077,8 +4200,8 @@
               <a:rPr lang="en-US" dirty="0"/>
               <a:t>So the question is — why a plugin and not just a prompt library?
 A prompt is a suggestion, and the AI may or may not follow it. A plugin enforces how you work — it's not optional, it's the system. And in this new role, where you're managing an AI rather than out-typing it, a suggestion simply isn't enough — you need something that actually holds.
-What we ended up with is a governance workflow — five discoveries, each one unlocking the next. Let's start with the first.
-Thirty-eight commands. Twenty-six skills. Fifty-two decisions written down. And it didn't arrive like that — it started as a single gate. The rest of it kept becoming obvious only after we'd hit the thing it didn't do yet. That's act one.</a:t>
+What I ended up with is a governance workflow — five discoveries, each one unlocking the next. Let's start with the first.
+</a:t>
             </a:r>
           </a:p>
         </p:txBody>
@@ -4165,8 +4288,35 @@
           <a:p>
             <a:r>
               <a:rPr lang="en-US" dirty="0"/>
-              <a:t>So discovery one is Spec — and the reason it comes first is straightforward. The AI will never ask you what you meant. It'll take whatever you give it and build with complete confidence, even if it's heading in entirely the wrong direction. Someone has to capture the intent before that happens, and that someone is you. That's what the spec is for.</a:t>
-            </a:r>
+              <a:t>The way, I learn is to first look at what failed and why, then understand it and finally the benefits. So, today we will also follow that. </a:t>
+            </a:r>
+            <a:br>
+              <a:rPr lang="en-US" dirty="0"/>
+            </a:br>
+            <a:br>
+              <a:rPr lang="en-US" dirty="0"/>
+            </a:br>
+            <a:r>
+              <a:rPr lang="en-US" dirty="0"/>
+              <a:t>So discovery one is Spec — and the reason it comes first is straightforward. </a:t>
+            </a:r>
+            <a:br>
+              <a:rPr lang="en-US" dirty="0"/>
+            </a:br>
+            <a:br>
+              <a:rPr lang="en-US" dirty="0"/>
+            </a:br>
+            <a:r>
+              <a:rPr lang="en-US" dirty="0"/>
+              <a:t>The AI will never ask you what you meant. It'll take whatever you give it and build with complete confidence, even if it's heading entirely in the wrong direction. Someone has to capture the intent before that happens, and that someone is you. That's what the spec is for.</a:t>
+            </a:r>
+            <a:br>
+              <a:rPr lang="en-US" dirty="0"/>
+            </a:br>
+            <a:br>
+              <a:rPr lang="en-US" dirty="0"/>
+            </a:br>
+            <a:endParaRPr lang="en-US" dirty="0"/>
           </a:p>
         </p:txBody>
       </p:sp>
@@ -15389,8 +15539,8 @@
         </p:nvSpPr>
         <p:spPr>
           <a:xfrm>
-            <a:off x="365760" y="182880"/>
-            <a:ext cx="2743200" cy="2286000"/>
+            <a:off x="365759" y="182880"/>
+            <a:ext cx="4577715" cy="2286000"/>
           </a:xfrm>
           <a:prstGeom prst="rect">
             <a:avLst/>
@@ -37119,7 +37269,7 @@
 </file>
 
 <file path=ppt/slides/slide5.xml><?xml version="1.0" encoding="utf-8"?>
-<p:sld xmlns:a="http://schemas.openxmlformats.org/drawingml/2006/main" xmlns:r="http://schemas.openxmlformats.org/officeDocument/2006/relationships" xmlns:p="http://schemas.openxmlformats.org/presentationml/2006/main">
+<p:sld xmlns:a="http://schemas.openxmlformats.org/drawingml/2006/main" xmlns:r="http://schemas.openxmlformats.org/officeDocument/2006/relationships" xmlns:p="http://schemas.openxmlformats.org/presentationml/2006/main" show="0">
   <p:cSld name="Slide 5">
     <p:spTree>
       <p:nvGrpSpPr>

--- a/docs/presentations/ai-assisted-development-story.pptx
+++ b/docs/presentations/ai-assisted-development-story.pptx
@@ -154,14 +154,6 @@
     </p:ext>
   </p:extLst>
 </p:presentation>
-</file>
-
-<file path=ppt/revisionInfo.xml><?xml version="1.0" encoding="utf-8"?>
-<p1510:revInfo xmlns:a="http://schemas.openxmlformats.org/drawingml/2006/main" xmlns:r="http://schemas.openxmlformats.org/officeDocument/2006/relationships" xmlns:p1510="http://schemas.microsoft.com/office/powerpoint/2015/10/main">
-  <p1510:revLst>
-    <p1510:client id="{3C73BF7C-5CFF-47DF-BA55-A3DD79C44D2D}" v="13" dt="2026-07-17T19:07:53.175"/>
-  </p1510:revLst>
-</p1510:revInfo>
 </file>
 
 <file path=ppt/notesMasters/notesMaster1.xml><?xml version="1.0" encoding="utf-8"?>
@@ -37190,24 +37182,24 @@
         </p:nvSpPr>
         <p:spPr>
           <a:xfrm>
-            <a:off x="548640" y="5806440"/>
-            <a:ext cx="10972800" cy="320040"/>
-          </a:xfrm>
-          <a:prstGeom prst="rect">
-            <a:avLst/>
-          </a:prstGeom>
-          <a:noFill/>
-          <a:ln/>
-        </p:spPr>
-        <p:txBody>
-          <a:bodyPr wrap="square" rtlCol="0" anchor="ctr"/>
-          <a:lstStyle/>
-          <a:p>
-            <a:pPr marL="0" indent="0">
-              <a:buNone/>
-            </a:pPr>
-            <a:r>
-              <a:rPr lang="en-US" sz="1400" dirty="0">
+            <a:off x="0" y="5806440"/>
+            <a:ext cx="12192000" cy="594360"/>
+          </a:xfrm>
+          <a:prstGeom prst="rect">
+            <a:avLst/>
+          </a:prstGeom>
+          <a:noFill/>
+          <a:ln/>
+        </p:spPr>
+        <p:txBody>
+          <a:bodyPr wrap="square" rtlCol="0" anchor="ctr"/>
+          <a:lstStyle/>
+          <a:p>
+            <a:pPr marL="0" indent="0" algn="ctr">
+              <a:buNone/>
+            </a:pPr>
+            <a:r>
+              <a:rPr lang="en-US" sz="4400" b="1" dirty="0">
                 <a:solidFill>
                   <a:srgbClr val="9DB2C7"/>
                 </a:solidFill>
@@ -37215,9 +37207,9 @@
                 <a:ea typeface="Segoe UI" pitchFamily="34" charset="-122"/>
                 <a:cs typeface="Segoe UI" pitchFamily="34" charset="-120"/>
               </a:rPr>
-              <a:t>Discussion.</a:t>
-            </a:r>
-            <a:endParaRPr lang="en-US" sz="1400" dirty="0"/>
+              <a:t>Q &amp; A</a:t>
+            </a:r>
+            <a:endParaRPr lang="en-US" sz="4400" b="1" dirty="0"/>
           </a:p>
         </p:txBody>
       </p:sp>
